--- a/Science_Complete_Course_SagarSir/03_Biology_जीव_विज्ञान/Class_14_Respiration_Circulation_Excretion.pptx
+++ b/Science_Complete_Course_SagarSir/03_Biology_जीव_विज्ञान/Class_14_Respiration_Circulation_Excretion.pptx
@@ -3573,7 +3573,7 @@
               </a:defRPr>
             </a:pPr>
             <a:r>
-              <a:t>मार्गदर्शक: सागर सर (NMMS King)  |  Helpline / WhatsApp: +91 91101 13671  |  Website: sagarcoaching.tech</a:t>
+              <a:t>मार्गदर्शक: सागर सर (NMMS King)  |  Website: sagarcoaching.tech</a:t>
             </a:r>
           </a:p>
         </p:txBody>
@@ -3745,7 +3745,7 @@
               </a:defRPr>
             </a:pPr>
             <a:r>
-              <a:t>WhatsApp / Helpline: +91 91101 13671  |  वेबसाइट: sagarcoaching.tech  |  Slide 10 of 37</a:t>
+              <a:t>वेबसाइट: sagarcoaching.tech  |  Slide 10 of 37</a:t>
             </a:r>
           </a:p>
         </p:txBody>
@@ -4192,7 +4192,7 @@
               </a:defRPr>
             </a:pPr>
             <a:r>
-              <a:t>WhatsApp / Helpline: +91 91101 13671  |  वेबसाइट: sagarcoaching.tech  |  Slide 11 of 37</a:t>
+              <a:t>वेबसाइट: sagarcoaching.tech  |  Slide 11 of 37</a:t>
             </a:r>
           </a:p>
         </p:txBody>
@@ -4710,7 +4710,7 @@
               </a:defRPr>
             </a:pPr>
             <a:r>
-              <a:t>WhatsApp / Helpline: +91 91101 13671  |  वेबसाइट: sagarcoaching.tech  |  Slide 12 of 37</a:t>
+              <a:t>वेबसाइट: sagarcoaching.tech  |  Slide 12 of 37</a:t>
             </a:r>
           </a:p>
         </p:txBody>
@@ -5157,7 +5157,7 @@
               </a:defRPr>
             </a:pPr>
             <a:r>
-              <a:t>WhatsApp / Helpline: +91 91101 13671  |  वेबसाइट: sagarcoaching.tech  |  Slide 13 of 37</a:t>
+              <a:t>वेबसाइट: sagarcoaching.tech  |  Slide 13 of 37</a:t>
             </a:r>
           </a:p>
         </p:txBody>
@@ -5675,7 +5675,7 @@
               </a:defRPr>
             </a:pPr>
             <a:r>
-              <a:t>WhatsApp / Helpline: +91 91101 13671  |  वेबसाइट: sagarcoaching.tech  |  Slide 14 of 37</a:t>
+              <a:t>वेबसाइट: sagarcoaching.tech  |  Slide 14 of 37</a:t>
             </a:r>
           </a:p>
         </p:txBody>
@@ -6122,7 +6122,7 @@
               </a:defRPr>
             </a:pPr>
             <a:r>
-              <a:t>WhatsApp / Helpline: +91 91101 13671  |  वेबसाइट: sagarcoaching.tech  |  Slide 15 of 37</a:t>
+              <a:t>वेबसाइट: sagarcoaching.tech  |  Slide 15 of 37</a:t>
             </a:r>
           </a:p>
         </p:txBody>
@@ -6640,7 +6640,7 @@
               </a:defRPr>
             </a:pPr>
             <a:r>
-              <a:t>WhatsApp / Helpline: +91 91101 13671  |  वेबसाइट: sagarcoaching.tech  |  Slide 16 of 37</a:t>
+              <a:t>वेबसाइट: sagarcoaching.tech  |  Slide 16 of 37</a:t>
             </a:r>
           </a:p>
         </p:txBody>
@@ -7087,7 +7087,7 @@
               </a:defRPr>
             </a:pPr>
             <a:r>
-              <a:t>WhatsApp / Helpline: +91 91101 13671  |  वेबसाइट: sagarcoaching.tech  |  Slide 17 of 37</a:t>
+              <a:t>वेबसाइट: sagarcoaching.tech  |  Slide 17 of 37</a:t>
             </a:r>
           </a:p>
         </p:txBody>
@@ -7605,7 +7605,7 @@
               </a:defRPr>
             </a:pPr>
             <a:r>
-              <a:t>WhatsApp / Helpline: +91 91101 13671  |  वेबसाइट: sagarcoaching.tech  |  Slide 18 of 37</a:t>
+              <a:t>वेबसाइट: sagarcoaching.tech  |  Slide 18 of 37</a:t>
             </a:r>
           </a:p>
         </p:txBody>
@@ -8052,7 +8052,7 @@
               </a:defRPr>
             </a:pPr>
             <a:r>
-              <a:t>WhatsApp / Helpline: +91 91101 13671  |  वेबसाइट: sagarcoaching.tech  |  Slide 19 of 37</a:t>
+              <a:t>वेबसाइट: sagarcoaching.tech  |  Slide 19 of 37</a:t>
             </a:r>
           </a:p>
         </p:txBody>
@@ -8570,7 +8570,7 @@
               </a:defRPr>
             </a:pPr>
             <a:r>
-              <a:t>WhatsApp / Helpline: +91 91101 13671  |  वेबसाइट: sagarcoaching.tech  |  Slide 2 of 37</a:t>
+              <a:t>वेबसाइट: sagarcoaching.tech  |  Slide 2 of 37</a:t>
             </a:r>
           </a:p>
         </p:txBody>
@@ -8885,7 +8885,7 @@
               </a:defRPr>
             </a:pPr>
             <a:r>
-              <a:t>WhatsApp / Helpline: +91 91101 13671  |  वेबसाइट: sagarcoaching.tech  |  Slide 20 of 37</a:t>
+              <a:t>वेबसाइट: sagarcoaching.tech  |  Slide 20 of 37</a:t>
             </a:r>
           </a:p>
         </p:txBody>
@@ -9332,7 +9332,7 @@
               </a:defRPr>
             </a:pPr>
             <a:r>
-              <a:t>WhatsApp / Helpline: +91 91101 13671  |  वेबसाइट: sagarcoaching.tech  |  Slide 21 of 37</a:t>
+              <a:t>वेबसाइट: sagarcoaching.tech  |  Slide 21 of 37</a:t>
             </a:r>
           </a:p>
         </p:txBody>
@@ -9850,7 +9850,7 @@
               </a:defRPr>
             </a:pPr>
             <a:r>
-              <a:t>WhatsApp / Helpline: +91 91101 13671  |  वेबसाइट: sagarcoaching.tech  |  Slide 22 of 37</a:t>
+              <a:t>वेबसाइट: sagarcoaching.tech  |  Slide 22 of 37</a:t>
             </a:r>
           </a:p>
         </p:txBody>
@@ -10297,7 +10297,7 @@
               </a:defRPr>
             </a:pPr>
             <a:r>
-              <a:t>WhatsApp / Helpline: +91 91101 13671  |  वेबसाइट: sagarcoaching.tech  |  Slide 23 of 37</a:t>
+              <a:t>वेबसाइट: sagarcoaching.tech  |  Slide 23 of 37</a:t>
             </a:r>
           </a:p>
         </p:txBody>
@@ -10815,7 +10815,7 @@
               </a:defRPr>
             </a:pPr>
             <a:r>
-              <a:t>WhatsApp / Helpline: +91 91101 13671  |  वेबसाइट: sagarcoaching.tech  |  Slide 24 of 37</a:t>
+              <a:t>वेबसाइट: sagarcoaching.tech  |  Slide 24 of 37</a:t>
             </a:r>
           </a:p>
         </p:txBody>
@@ -11262,7 +11262,7 @@
               </a:defRPr>
             </a:pPr>
             <a:r>
-              <a:t>WhatsApp / Helpline: +91 91101 13671  |  वेबसाइट: sagarcoaching.tech  |  Slide 25 of 37</a:t>
+              <a:t>वेबसाइट: sagarcoaching.tech  |  Slide 25 of 37</a:t>
             </a:r>
           </a:p>
         </p:txBody>
@@ -11780,7 +11780,7 @@
               </a:defRPr>
             </a:pPr>
             <a:r>
-              <a:t>WhatsApp / Helpline: +91 91101 13671  |  वेबसाइट: sagarcoaching.tech  |  Slide 26 of 37</a:t>
+              <a:t>वेबसाइट: sagarcoaching.tech  |  Slide 26 of 37</a:t>
             </a:r>
           </a:p>
         </p:txBody>
@@ -12227,7 +12227,7 @@
               </a:defRPr>
             </a:pPr>
             <a:r>
-              <a:t>WhatsApp / Helpline: +91 91101 13671  |  वेबसाइट: sagarcoaching.tech  |  Slide 27 of 37</a:t>
+              <a:t>वेबसाइट: sagarcoaching.tech  |  Slide 27 of 37</a:t>
             </a:r>
           </a:p>
         </p:txBody>
@@ -12745,7 +12745,7 @@
               </a:defRPr>
             </a:pPr>
             <a:r>
-              <a:t>WhatsApp / Helpline: +91 91101 13671  |  वेबसाइट: sagarcoaching.tech  |  Slide 28 of 37</a:t>
+              <a:t>वेबसाइट: sagarcoaching.tech  |  Slide 28 of 37</a:t>
             </a:r>
           </a:p>
         </p:txBody>
@@ -13192,7 +13192,7 @@
               </a:defRPr>
             </a:pPr>
             <a:r>
-              <a:t>WhatsApp / Helpline: +91 91101 13671  |  वेबसाइट: sagarcoaching.tech  |  Slide 29 of 37</a:t>
+              <a:t>वेबसाइट: sagarcoaching.tech  |  Slide 29 of 37</a:t>
             </a:r>
           </a:p>
         </p:txBody>
@@ -13710,7 +13710,7 @@
               </a:defRPr>
             </a:pPr>
             <a:r>
-              <a:t>WhatsApp / Helpline: +91 91101 13671  |  वेबसाइट: sagarcoaching.tech  |  Slide 3 of 37</a:t>
+              <a:t>वेबसाइट: sagarcoaching.tech  |  Slide 3 of 37</a:t>
             </a:r>
           </a:p>
         </p:txBody>
@@ -14033,7 +14033,7 @@
               </a:defRPr>
             </a:pPr>
             <a:r>
-              <a:t>WhatsApp / Helpline: +91 91101 13671  |  वेबसाइट: sagarcoaching.tech  |  Slide 30 of 37</a:t>
+              <a:t>वेबसाइट: sagarcoaching.tech  |  Slide 30 of 37</a:t>
             </a:r>
           </a:p>
         </p:txBody>
@@ -14480,7 +14480,7 @@
               </a:defRPr>
             </a:pPr>
             <a:r>
-              <a:t>WhatsApp / Helpline: +91 91101 13671  |  वेबसाइट: sagarcoaching.tech  |  Slide 31 of 37</a:t>
+              <a:t>वेबसाइट: sagarcoaching.tech  |  Slide 31 of 37</a:t>
             </a:r>
           </a:p>
         </p:txBody>
@@ -14998,7 +14998,7 @@
               </a:defRPr>
             </a:pPr>
             <a:r>
-              <a:t>WhatsApp / Helpline: +91 91101 13671  |  वेबसाइट: sagarcoaching.tech  |  Slide 32 of 37</a:t>
+              <a:t>वेबसाइट: sagarcoaching.tech  |  Slide 32 of 37</a:t>
             </a:r>
           </a:p>
         </p:txBody>
@@ -15445,7 +15445,7 @@
               </a:defRPr>
             </a:pPr>
             <a:r>
-              <a:t>WhatsApp / Helpline: +91 91101 13671  |  वेबसाइट: sagarcoaching.tech  |  Slide 33 of 37</a:t>
+              <a:t>वेबसाइट: sagarcoaching.tech  |  Slide 33 of 37</a:t>
             </a:r>
           </a:p>
         </p:txBody>
@@ -15963,7 +15963,7 @@
               </a:defRPr>
             </a:pPr>
             <a:r>
-              <a:t>WhatsApp / Helpline: +91 91101 13671  |  वेबसाइट: sagarcoaching.tech  |  Slide 34 of 37</a:t>
+              <a:t>वेबसाइट: sagarcoaching.tech  |  Slide 34 of 37</a:t>
             </a:r>
           </a:p>
         </p:txBody>
@@ -16410,7 +16410,7 @@
               </a:defRPr>
             </a:pPr>
             <a:r>
-              <a:t>WhatsApp / Helpline: +91 91101 13671  |  वेबसाइट: sagarcoaching.tech  |  Slide 35 of 37</a:t>
+              <a:t>वेबसाइट: sagarcoaching.tech  |  Slide 35 of 37</a:t>
             </a:r>
           </a:p>
         </p:txBody>
@@ -16928,7 +16928,7 @@
               </a:defRPr>
             </a:pPr>
             <a:r>
-              <a:t>WhatsApp / Helpline: +91 91101 13671  |  वेबसाइट: sagarcoaching.tech  |  Slide 36 of 37</a:t>
+              <a:t>वेबसाइट: sagarcoaching.tech  |  Slide 36 of 37</a:t>
             </a:r>
           </a:p>
         </p:txBody>
@@ -17250,7 +17250,7 @@
               </a:defRPr>
             </a:pPr>
             <a:r>
-              <a:t>WhatsApp / Helpline: +91 91101 13671  |  वेबसाइट: sagarcoaching.tech  |  Slide 37 of 37</a:t>
+              <a:t>वेबसाइट: sagarcoaching.tech  |  Slide 37 of 37</a:t>
             </a:r>
           </a:p>
         </p:txBody>
@@ -17534,7 +17534,7 @@
               </a:defRPr>
             </a:pPr>
             <a:r>
-              <a:t>WhatsApp / Helpline: +91 91101 13671  |  वेबसाइट: sagarcoaching.tech  |  Slide 4 of 37</a:t>
+              <a:t>वेबसाइट: sagarcoaching.tech  |  Slide 4 of 37</a:t>
             </a:r>
           </a:p>
         </p:txBody>
@@ -17856,7 +17856,7 @@
               </a:defRPr>
             </a:pPr>
             <a:r>
-              <a:t>WhatsApp / Helpline: +91 91101 13671  |  वेबसाइट: sagarcoaching.tech  |  Slide 5 of 37</a:t>
+              <a:t>वेबसाइट: sagarcoaching.tech  |  Slide 5 of 37</a:t>
             </a:r>
           </a:p>
         </p:txBody>
@@ -18178,7 +18178,7 @@
               </a:defRPr>
             </a:pPr>
             <a:r>
-              <a:t>WhatsApp / Helpline: +91 91101 13671  |  वेबसाइट: sagarcoaching.tech  |  Slide 6 of 37</a:t>
+              <a:t>वेबसाइट: sagarcoaching.tech  |  Slide 6 of 37</a:t>
             </a:r>
           </a:p>
         </p:txBody>
@@ -18625,7 +18625,7 @@
               </a:defRPr>
             </a:pPr>
             <a:r>
-              <a:t>WhatsApp / Helpline: +91 91101 13671  |  वेबसाइट: sagarcoaching.tech  |  Slide 7 of 37</a:t>
+              <a:t>वेबसाइट: sagarcoaching.tech  |  Slide 7 of 37</a:t>
             </a:r>
           </a:p>
         </p:txBody>
@@ -19143,7 +19143,7 @@
               </a:defRPr>
             </a:pPr>
             <a:r>
-              <a:t>WhatsApp / Helpline: +91 91101 13671  |  वेबसाइट: sagarcoaching.tech  |  Slide 8 of 37</a:t>
+              <a:t>वेबसाइट: sagarcoaching.tech  |  Slide 8 of 37</a:t>
             </a:r>
           </a:p>
         </p:txBody>
@@ -19590,7 +19590,7 @@
               </a:defRPr>
             </a:pPr>
             <a:r>
-              <a:t>WhatsApp / Helpline: +91 91101 13671  |  वेबसाइट: sagarcoaching.tech  |  Slide 9 of 37</a:t>
+              <a:t>वेबसाइट: sagarcoaching.tech  |  Slide 9 of 37</a:t>
             </a:r>
           </a:p>
         </p:txBody>
